--- a/Functional Programming in Java.pptx
+++ b/Functional Programming in Java.pptx
@@ -115,6 +115,11 @@
       </a:defRPr>
     </a:lvl9pPr>
   </p:defaultTextStyle>
+  <p:extLst>
+    <p:ext uri="{EFAFB233-063F-42B5-8137-9DF3F51BA10A}">
+      <p15:sldGuideLst xmlns:p15="http://schemas.microsoft.com/office/powerpoint/2012/main"/>
+    </p:ext>
+  </p:extLst>
 </p:presentation>
 </file>
 
@@ -267,7 +272,7 @@
           <a:p>
             <a:fld id="{0ED6C887-FD0D-4256-B71C-C5EDF4853D63}" type="datetimeFigureOut">
               <a:rPr lang="en-IN" smtClean="0"/>
-              <a:t>17-10-2023</a:t>
+              <a:t>27-10-2023</a:t>
             </a:fld>
             <a:endParaRPr lang="en-IN"/>
           </a:p>
@@ -467,7 +472,7 @@
           <a:p>
             <a:fld id="{0ED6C887-FD0D-4256-B71C-C5EDF4853D63}" type="datetimeFigureOut">
               <a:rPr lang="en-IN" smtClean="0"/>
-              <a:t>17-10-2023</a:t>
+              <a:t>27-10-2023</a:t>
             </a:fld>
             <a:endParaRPr lang="en-IN"/>
           </a:p>
@@ -677,7 +682,7 @@
           <a:p>
             <a:fld id="{0ED6C887-FD0D-4256-B71C-C5EDF4853D63}" type="datetimeFigureOut">
               <a:rPr lang="en-IN" smtClean="0"/>
-              <a:t>17-10-2023</a:t>
+              <a:t>27-10-2023</a:t>
             </a:fld>
             <a:endParaRPr lang="en-IN"/>
           </a:p>
@@ -877,7 +882,7 @@
           <a:p>
             <a:fld id="{0ED6C887-FD0D-4256-B71C-C5EDF4853D63}" type="datetimeFigureOut">
               <a:rPr lang="en-IN" smtClean="0"/>
-              <a:t>17-10-2023</a:t>
+              <a:t>27-10-2023</a:t>
             </a:fld>
             <a:endParaRPr lang="en-IN"/>
           </a:p>
@@ -1153,7 +1158,7 @@
           <a:p>
             <a:fld id="{0ED6C887-FD0D-4256-B71C-C5EDF4853D63}" type="datetimeFigureOut">
               <a:rPr lang="en-IN" smtClean="0"/>
-              <a:t>17-10-2023</a:t>
+              <a:t>27-10-2023</a:t>
             </a:fld>
             <a:endParaRPr lang="en-IN"/>
           </a:p>
@@ -1421,7 +1426,7 @@
           <a:p>
             <a:fld id="{0ED6C887-FD0D-4256-B71C-C5EDF4853D63}" type="datetimeFigureOut">
               <a:rPr lang="en-IN" smtClean="0"/>
-              <a:t>17-10-2023</a:t>
+              <a:t>27-10-2023</a:t>
             </a:fld>
             <a:endParaRPr lang="en-IN"/>
           </a:p>
@@ -1836,7 +1841,7 @@
           <a:p>
             <a:fld id="{0ED6C887-FD0D-4256-B71C-C5EDF4853D63}" type="datetimeFigureOut">
               <a:rPr lang="en-IN" smtClean="0"/>
-              <a:t>17-10-2023</a:t>
+              <a:t>27-10-2023</a:t>
             </a:fld>
             <a:endParaRPr lang="en-IN"/>
           </a:p>
@@ -1978,7 +1983,7 @@
           <a:p>
             <a:fld id="{0ED6C887-FD0D-4256-B71C-C5EDF4853D63}" type="datetimeFigureOut">
               <a:rPr lang="en-IN" smtClean="0"/>
-              <a:t>17-10-2023</a:t>
+              <a:t>27-10-2023</a:t>
             </a:fld>
             <a:endParaRPr lang="en-IN"/>
           </a:p>
@@ -2091,7 +2096,7 @@
           <a:p>
             <a:fld id="{0ED6C887-FD0D-4256-B71C-C5EDF4853D63}" type="datetimeFigureOut">
               <a:rPr lang="en-IN" smtClean="0"/>
-              <a:t>17-10-2023</a:t>
+              <a:t>27-10-2023</a:t>
             </a:fld>
             <a:endParaRPr lang="en-IN"/>
           </a:p>
@@ -2404,7 +2409,7 @@
           <a:p>
             <a:fld id="{0ED6C887-FD0D-4256-B71C-C5EDF4853D63}" type="datetimeFigureOut">
               <a:rPr lang="en-IN" smtClean="0"/>
-              <a:t>17-10-2023</a:t>
+              <a:t>27-10-2023</a:t>
             </a:fld>
             <a:endParaRPr lang="en-IN"/>
           </a:p>
@@ -2693,7 +2698,7 @@
           <a:p>
             <a:fld id="{0ED6C887-FD0D-4256-B71C-C5EDF4853D63}" type="datetimeFigureOut">
               <a:rPr lang="en-IN" smtClean="0"/>
-              <a:t>17-10-2023</a:t>
+              <a:t>27-10-2023</a:t>
             </a:fld>
             <a:endParaRPr lang="en-IN"/>
           </a:p>
@@ -2936,7 +2941,7 @@
           <a:p>
             <a:fld id="{0ED6C887-FD0D-4256-B71C-C5EDF4853D63}" type="datetimeFigureOut">
               <a:rPr lang="en-IN" smtClean="0"/>
-              <a:t>17-10-2023</a:t>
+              <a:t>27-10-2023</a:t>
             </a:fld>
             <a:endParaRPr lang="en-IN"/>
           </a:p>
@@ -4069,8 +4074,8 @@
         </p:nvSpPr>
         <p:spPr bwMode="auto">
           <a:xfrm>
-            <a:off x="707571" y="3378055"/>
-            <a:ext cx="9198429" cy="1508105"/>
+            <a:off x="707571" y="3270333"/>
+            <a:ext cx="9198429" cy="1723549"/>
           </a:xfrm>
           <a:prstGeom prst="rect">
             <a:avLst/>
@@ -4135,7 +4140,7 @@
               <a:tabLst/>
             </a:pPr>
             <a:r>
-              <a:rPr kumimoji="0" lang="en-US" altLang="en-US" sz="1400" b="0" i="0" u="none" strike="noStrike" cap="none" normalizeH="0" baseline="0" dirty="0">
+              <a:rPr kumimoji="0" lang="en-US" altLang="en-US" sz="1400" b="0" i="0" u="none" strike="noStrike" cap="none" normalizeH="0" baseline="0">
                 <a:ln>
                   <a:noFill/>
                 </a:ln>
@@ -4145,7 +4150,51 @@
                 <a:effectLst/>
                 <a:latin typeface="Roboto Mono" panose="00000009000000000000" pitchFamily="49" charset="0"/>
               </a:rPr>
-              <a:t>@FunctionalInterface public interface </a:t>
+              <a:t>@FunctionalInterface</a:t>
+            </a:r>
+          </a:p>
+          <a:p>
+            <a:pPr marL="0" marR="0" lvl="0" indent="0" algn="l" defTabSz="914400" rtl="0" eaLnBrk="0" fontAlgn="base" latinLnBrk="0" hangingPunct="0">
+              <a:lnSpc>
+                <a:spcPct val="100000"/>
+              </a:lnSpc>
+              <a:spcBef>
+                <a:spcPct val="0"/>
+              </a:spcBef>
+              <a:spcAft>
+                <a:spcPct val="0"/>
+              </a:spcAft>
+              <a:buClrTx/>
+              <a:buSzTx/>
+              <a:buFontTx/>
+              <a:buNone/>
+              <a:tabLst/>
+            </a:pPr>
+            <a:r>
+              <a:rPr kumimoji="0" lang="en-US" altLang="en-US" sz="1400" b="0" i="0" u="none" strike="noStrike" cap="none" normalizeH="0" baseline="0">
+                <a:ln>
+                  <a:noFill/>
+                </a:ln>
+                <a:solidFill>
+                  <a:schemeClr val="tx1"/>
+                </a:solidFill>
+                <a:effectLst/>
+                <a:latin typeface="Roboto Mono" panose="00000009000000000000" pitchFamily="49" charset="0"/>
+              </a:rPr>
+              <a:t>public </a:t>
+            </a:r>
+            <a:r>
+              <a:rPr kumimoji="0" lang="en-US" altLang="en-US" sz="1400" b="0" i="0" u="none" strike="noStrike" cap="none" normalizeH="0" baseline="0" dirty="0">
+                <a:ln>
+                  <a:noFill/>
+                </a:ln>
+                <a:solidFill>
+                  <a:schemeClr val="tx1"/>
+                </a:solidFill>
+                <a:effectLst/>
+                <a:latin typeface="Roboto Mono" panose="00000009000000000000" pitchFamily="49" charset="0"/>
+              </a:rPr>
+              <a:t>interface </a:t>
             </a:r>
             <a:r>
               <a:rPr kumimoji="0" lang="en-US" altLang="en-US" sz="1400" b="0" i="0" u="none" strike="noStrike" cap="none" normalizeH="0" baseline="0" dirty="0" err="1">
@@ -7128,7 +7177,7 @@
         <p:spPr>
           <a:xfrm>
             <a:off x="446313" y="1934368"/>
-            <a:ext cx="11310257" cy="4524315"/>
+            <a:ext cx="11310257" cy="4770537"/>
           </a:xfrm>
           <a:prstGeom prst="rect">
             <a:avLst/>
@@ -7146,13 +7195,13 @@
               <a:buChar char="•"/>
             </a:pPr>
             <a:r>
-              <a:rPr lang="en-IN" b="1" dirty="0">
+              <a:rPr lang="en-IN" sz="1600" b="1" dirty="0">
                 <a:latin typeface="Nunito" pitchFamily="2" charset="0"/>
               </a:rPr>
               <a:t>Consumer</a:t>
             </a:r>
             <a:r>
-              <a:rPr lang="en-IN" dirty="0">
+              <a:rPr lang="en-IN" sz="1600" dirty="0">
                 <a:latin typeface="Nunito" pitchFamily="2" charset="0"/>
               </a:rPr>
               <a:t> : accepts only one argument and returns nothing. </a:t>
@@ -7164,54 +7213,54 @@
               <a:buChar char="•"/>
             </a:pPr>
             <a:r>
-              <a:rPr lang="en-IN" dirty="0">
+              <a:rPr lang="en-IN" sz="1600" dirty="0">
                 <a:latin typeface="Nunito" pitchFamily="2" charset="0"/>
               </a:rPr>
               <a:t>Variants : </a:t>
             </a:r>
             <a:r>
-              <a:rPr lang="en-IN" dirty="0" err="1">
+              <a:rPr lang="en-IN" sz="1600" dirty="0" err="1">
                 <a:latin typeface="Nunito" pitchFamily="2" charset="0"/>
               </a:rPr>
               <a:t>BiConsumer</a:t>
             </a:r>
             <a:r>
-              <a:rPr lang="en-IN" dirty="0">
+              <a:rPr lang="en-IN" sz="1600" dirty="0">
                 <a:latin typeface="Nunito" pitchFamily="2" charset="0"/>
               </a:rPr>
               <a:t>, </a:t>
             </a:r>
             <a:r>
-              <a:rPr lang="en-IN" dirty="0" err="1">
+              <a:rPr lang="en-IN" sz="1600" dirty="0" err="1">
                 <a:latin typeface="Nunito" pitchFamily="2" charset="0"/>
               </a:rPr>
               <a:t>DoubleConsumer</a:t>
             </a:r>
             <a:r>
-              <a:rPr lang="en-IN" dirty="0">
+              <a:rPr lang="en-IN" sz="1600" dirty="0">
                 <a:latin typeface="Nunito" pitchFamily="2" charset="0"/>
               </a:rPr>
               <a:t>, </a:t>
             </a:r>
             <a:r>
-              <a:rPr lang="en-IN" dirty="0" err="1">
+              <a:rPr lang="en-IN" sz="1600" dirty="0" err="1">
                 <a:latin typeface="Nunito" pitchFamily="2" charset="0"/>
               </a:rPr>
               <a:t>IntConsumer</a:t>
             </a:r>
             <a:r>
-              <a:rPr lang="en-IN" dirty="0">
+              <a:rPr lang="en-IN" sz="1600" dirty="0">
                 <a:latin typeface="Nunito" pitchFamily="2" charset="0"/>
               </a:rPr>
               <a:t>, and </a:t>
             </a:r>
             <a:r>
-              <a:rPr lang="en-IN" dirty="0" err="1">
+              <a:rPr lang="en-IN" sz="1600" dirty="0" err="1">
                 <a:latin typeface="Nunito" pitchFamily="2" charset="0"/>
               </a:rPr>
               <a:t>LongConsumer</a:t>
             </a:r>
-            <a:endParaRPr lang="en-IN" dirty="0">
+            <a:endParaRPr lang="en-IN" sz="1600" dirty="0">
               <a:latin typeface="Nunito" pitchFamily="2" charset="0"/>
             </a:endParaRPr>
           </a:p>
@@ -7221,22 +7270,49 @@
               <a:buChar char="•"/>
             </a:pPr>
             <a:r>
-              <a:rPr lang="en-IN" dirty="0">
+              <a:rPr lang="en-IN" sz="1600" dirty="0">
                 <a:latin typeface="Nunito" pitchFamily="2" charset="0"/>
               </a:rPr>
-              <a:t>Example :	Consumer&lt;Integer&gt; consumer = (value) -&gt; </a:t>
-            </a:r>
-            <a:r>
-              <a:rPr lang="en-IN" dirty="0" err="1">
+              <a:t>Example :	</a:t>
+            </a:r>
+            <a:r>
+              <a:rPr lang="en-US" sz="1600" dirty="0">
                 <a:latin typeface="Nunito" pitchFamily="2" charset="0"/>
               </a:rPr>
+              <a:t>Consumer&lt;Integer&gt; display = a -&gt; </a:t>
+            </a:r>
+            <a:r>
+              <a:rPr lang="en-US" sz="1600" dirty="0" err="1">
+                <a:latin typeface="Nunito" pitchFamily="2" charset="0"/>
+              </a:rPr>
               <a:t>System.out.println</a:t>
             </a:r>
             <a:r>
-              <a:rPr lang="en-IN" dirty="0">
+              <a:rPr lang="en-US" sz="1600" dirty="0">
                 <a:latin typeface="Nunito" pitchFamily="2" charset="0"/>
               </a:rPr>
-              <a:t>(value);</a:t>
+              <a:t>(a);</a:t>
+            </a:r>
+          </a:p>
+          <a:p>
+            <a:pPr lvl="4"/>
+            <a:r>
+              <a:rPr lang="en-IN" sz="1600" dirty="0" err="1">
+                <a:latin typeface="Nunito" pitchFamily="2" charset="0"/>
+              </a:rPr>
+              <a:t>display.</a:t>
+            </a:r>
+            <a:r>
+              <a:rPr lang="en-IN" sz="1600" b="1" dirty="0" err="1">
+                <a:latin typeface="Nunito" pitchFamily="2" charset="0"/>
+              </a:rPr>
+              <a:t>accept</a:t>
+            </a:r>
+            <a:r>
+              <a:rPr lang="en-IN" sz="1600" dirty="0">
+                <a:latin typeface="Nunito" pitchFamily="2" charset="0"/>
+              </a:rPr>
+              <a:t>(10);</a:t>
             </a:r>
           </a:p>
           <a:p>
@@ -7244,7 +7320,7 @@
               <a:buFont typeface="Arial" panose="020B0604020202020204" pitchFamily="34" charset="0"/>
               <a:buChar char="•"/>
             </a:pPr>
-            <a:endParaRPr lang="en-IN" dirty="0">
+            <a:endParaRPr lang="en-IN" sz="1600" dirty="0">
               <a:latin typeface="Nunito" pitchFamily="2" charset="0"/>
             </a:endParaRPr>
           </a:p>
@@ -7254,19 +7330,19 @@
               <a:buChar char="•"/>
             </a:pPr>
             <a:r>
-              <a:rPr lang="en-IN" b="1" dirty="0">
+              <a:rPr lang="en-IN" sz="1600" b="1" dirty="0">
                 <a:latin typeface="Nunito" pitchFamily="2" charset="0"/>
               </a:rPr>
               <a:t>Supplier</a:t>
             </a:r>
             <a:r>
-              <a:rPr lang="en-IN" dirty="0">
+              <a:rPr lang="en-IN" sz="1600" dirty="0">
                 <a:latin typeface="Nunito" pitchFamily="2" charset="0"/>
               </a:rPr>
               <a:t> : </a:t>
             </a:r>
             <a:r>
-              <a:rPr lang="en-US" dirty="0">
+              <a:rPr lang="en-US" sz="1600" dirty="0">
                 <a:latin typeface="Nunito" pitchFamily="2" charset="0"/>
               </a:rPr>
               <a:t>does not take any input or argument and yet returns a single output</a:t>
@@ -7278,54 +7354,54 @@
               <a:buChar char="•"/>
             </a:pPr>
             <a:r>
-              <a:rPr lang="en-US" dirty="0">
+              <a:rPr lang="en-US" sz="1600" dirty="0">
                 <a:latin typeface="Nunito" pitchFamily="2" charset="0"/>
               </a:rPr>
               <a:t>Variant : </a:t>
             </a:r>
             <a:r>
-              <a:rPr lang="en-US" dirty="0" err="1">
+              <a:rPr lang="en-US" sz="1600" dirty="0" err="1">
                 <a:latin typeface="Nunito" pitchFamily="2" charset="0"/>
               </a:rPr>
               <a:t>BooleanSupplier</a:t>
             </a:r>
             <a:r>
-              <a:rPr lang="en-US" dirty="0">
+              <a:rPr lang="en-US" sz="1600" dirty="0">
                 <a:latin typeface="Nunito" pitchFamily="2" charset="0"/>
               </a:rPr>
               <a:t>, </a:t>
             </a:r>
             <a:r>
-              <a:rPr lang="en-US" dirty="0" err="1">
+              <a:rPr lang="en-US" sz="1600" dirty="0" err="1">
                 <a:latin typeface="Nunito" pitchFamily="2" charset="0"/>
               </a:rPr>
               <a:t>DoubleSupplier</a:t>
             </a:r>
             <a:r>
-              <a:rPr lang="en-US" dirty="0">
+              <a:rPr lang="en-US" sz="1600" dirty="0">
                 <a:latin typeface="Nunito" pitchFamily="2" charset="0"/>
               </a:rPr>
               <a:t>, </a:t>
             </a:r>
             <a:r>
-              <a:rPr lang="en-US" dirty="0" err="1">
+              <a:rPr lang="en-US" sz="1600" dirty="0" err="1">
                 <a:latin typeface="Nunito" pitchFamily="2" charset="0"/>
               </a:rPr>
               <a:t>LongSupplier</a:t>
             </a:r>
             <a:r>
-              <a:rPr lang="en-US" dirty="0">
+              <a:rPr lang="en-US" sz="1600" dirty="0">
                 <a:latin typeface="Nunito" pitchFamily="2" charset="0"/>
               </a:rPr>
               <a:t>, and </a:t>
             </a:r>
             <a:r>
-              <a:rPr lang="en-US" dirty="0" err="1">
+              <a:rPr lang="en-US" sz="1600" dirty="0" err="1">
                 <a:latin typeface="Nunito" pitchFamily="2" charset="0"/>
               </a:rPr>
               <a:t>IntSupplier</a:t>
             </a:r>
-            <a:endParaRPr lang="en-US" dirty="0">
+            <a:endParaRPr lang="en-US" sz="1600" dirty="0">
               <a:latin typeface="Nunito" pitchFamily="2" charset="0"/>
             </a:endParaRPr>
           </a:p>
@@ -7335,51 +7411,87 @@
               <a:buChar char="•"/>
             </a:pPr>
             <a:r>
-              <a:rPr lang="en-US" dirty="0">
+              <a:rPr lang="en-US" sz="1600" dirty="0">
                 <a:latin typeface="Nunito" pitchFamily="2" charset="0"/>
               </a:rPr>
               <a:t>Example : </a:t>
             </a:r>
             <a:r>
-              <a:rPr lang="fr-FR" dirty="0">
+              <a:rPr lang="fr-FR" sz="1600" dirty="0">
                 <a:latin typeface="Nunito" pitchFamily="2" charset="0"/>
               </a:rPr>
               <a:t>Supplier&lt;Double&gt; </a:t>
             </a:r>
             <a:r>
-              <a:rPr lang="fr-FR" dirty="0" err="1">
+              <a:rPr lang="fr-FR" sz="1600" dirty="0" err="1">
                 <a:latin typeface="Nunito" pitchFamily="2" charset="0"/>
               </a:rPr>
               <a:t>randomValue</a:t>
             </a:r>
             <a:r>
-              <a:rPr lang="fr-FR" dirty="0">
+              <a:rPr lang="fr-FR" sz="1600" dirty="0">
                 <a:latin typeface="Nunito" pitchFamily="2" charset="0"/>
               </a:rPr>
               <a:t> = () -&gt; </a:t>
             </a:r>
             <a:r>
-              <a:rPr lang="fr-FR" dirty="0" err="1">
+              <a:rPr lang="fr-FR" sz="1600" dirty="0" err="1">
                 <a:latin typeface="Nunito" pitchFamily="2" charset="0"/>
               </a:rPr>
               <a:t>Math.random</a:t>
             </a:r>
             <a:r>
-              <a:rPr lang="fr-FR" dirty="0">
+              <a:rPr lang="fr-FR" sz="1600" dirty="0">
                 <a:latin typeface="Nunito" pitchFamily="2" charset="0"/>
               </a:rPr>
               <a:t>();</a:t>
             </a:r>
-            <a:endParaRPr lang="en-IN" dirty="0">
-              <a:latin typeface="Nunito" pitchFamily="2" charset="0"/>
-            </a:endParaRPr>
+          </a:p>
+          <a:p>
+            <a:pPr lvl="3"/>
+            <a:r>
+              <a:rPr lang="en-IN" sz="1600" dirty="0">
+                <a:latin typeface="Nunito" pitchFamily="2" charset="0"/>
+              </a:rPr>
+              <a:t>     </a:t>
+            </a:r>
+            <a:r>
+              <a:rPr lang="en-IN" sz="1600" dirty="0" err="1">
+                <a:latin typeface="Nunito" pitchFamily="2" charset="0"/>
+              </a:rPr>
+              <a:t>System.out.println</a:t>
+            </a:r>
+            <a:r>
+              <a:rPr lang="en-IN" sz="1600" dirty="0">
+                <a:latin typeface="Nunito" pitchFamily="2" charset="0"/>
+              </a:rPr>
+              <a:t>(</a:t>
+            </a:r>
+            <a:r>
+              <a:rPr lang="en-IN" sz="1600" dirty="0" err="1">
+                <a:latin typeface="Nunito" pitchFamily="2" charset="0"/>
+              </a:rPr>
+              <a:t>randomValue.</a:t>
+            </a:r>
+            <a:r>
+              <a:rPr lang="en-IN" sz="1600" b="1" dirty="0" err="1">
+                <a:latin typeface="Nunito" pitchFamily="2" charset="0"/>
+              </a:rPr>
+              <a:t>get</a:t>
+            </a:r>
+            <a:r>
+              <a:rPr lang="en-IN" sz="1600" dirty="0">
+                <a:latin typeface="Nunito" pitchFamily="2" charset="0"/>
+              </a:rPr>
+              <a:t>()); </a:t>
+            </a:r>
           </a:p>
           <a:p>
             <a:pPr marL="285750" indent="-285750">
               <a:buFont typeface="Arial" panose="020B0604020202020204" pitchFamily="34" charset="0"/>
               <a:buChar char="•"/>
             </a:pPr>
-            <a:endParaRPr lang="en-IN" dirty="0">
+            <a:endParaRPr lang="en-IN" sz="1600" dirty="0">
               <a:latin typeface="Nunito" pitchFamily="2" charset="0"/>
             </a:endParaRPr>
           </a:p>
@@ -7389,31 +7501,31 @@
               <a:buChar char="•"/>
             </a:pPr>
             <a:r>
-              <a:rPr lang="en-IN" b="1" dirty="0">
+              <a:rPr lang="en-IN" sz="1600" b="1" dirty="0">
                 <a:latin typeface="Nunito" pitchFamily="2" charset="0"/>
               </a:rPr>
               <a:t>Predicate</a:t>
             </a:r>
             <a:r>
-              <a:rPr lang="en-IN" dirty="0">
+              <a:rPr lang="en-IN" sz="1600" dirty="0">
                 <a:latin typeface="Nunito" pitchFamily="2" charset="0"/>
               </a:rPr>
               <a:t> : </a:t>
             </a:r>
             <a:r>
-              <a:rPr lang="en-US" dirty="0">
+              <a:rPr lang="en-US" sz="1600" dirty="0">
                 <a:latin typeface="Nunito" pitchFamily="2" charset="0"/>
               </a:rPr>
               <a:t>accepts an argument and, in return, generates a </a:t>
             </a:r>
             <a:r>
-              <a:rPr lang="en-US" dirty="0" err="1">
+              <a:rPr lang="en-US" sz="1600" dirty="0" err="1">
                 <a:latin typeface="Nunito" pitchFamily="2" charset="0"/>
               </a:rPr>
               <a:t>boolean</a:t>
             </a:r>
             <a:r>
-              <a:rPr lang="en-US" dirty="0">
+              <a:rPr lang="en-US" sz="1600" dirty="0">
                 <a:latin typeface="Nunito" pitchFamily="2" charset="0"/>
               </a:rPr>
               <a:t> value</a:t>
@@ -7425,54 +7537,54 @@
               <a:buChar char="•"/>
             </a:pPr>
             <a:r>
-              <a:rPr lang="en-US" dirty="0">
+              <a:rPr lang="en-US" sz="1600" dirty="0">
                 <a:latin typeface="Nunito" pitchFamily="2" charset="0"/>
               </a:rPr>
               <a:t>Variants : </a:t>
             </a:r>
             <a:r>
-              <a:rPr lang="en-US" dirty="0" err="1">
+              <a:rPr lang="en-US" sz="1600" dirty="0" err="1">
                 <a:latin typeface="Nunito" pitchFamily="2" charset="0"/>
               </a:rPr>
               <a:t>BiPredicate</a:t>
             </a:r>
             <a:r>
-              <a:rPr lang="en-US" dirty="0">
+              <a:rPr lang="en-US" sz="1600" dirty="0">
                 <a:latin typeface="Nunito" pitchFamily="2" charset="0"/>
               </a:rPr>
               <a:t>, </a:t>
             </a:r>
             <a:r>
-              <a:rPr lang="en-US" dirty="0" err="1">
+              <a:rPr lang="en-US" sz="1600" dirty="0" err="1">
                 <a:latin typeface="Nunito" pitchFamily="2" charset="0"/>
               </a:rPr>
               <a:t>IntPredicate</a:t>
             </a:r>
             <a:r>
-              <a:rPr lang="en-US" dirty="0">
+              <a:rPr lang="en-US" sz="1600" dirty="0">
                 <a:latin typeface="Nunito" pitchFamily="2" charset="0"/>
               </a:rPr>
               <a:t>, </a:t>
             </a:r>
             <a:r>
-              <a:rPr lang="en-US" dirty="0" err="1">
+              <a:rPr lang="en-US" sz="1600" dirty="0" err="1">
                 <a:latin typeface="Nunito" pitchFamily="2" charset="0"/>
               </a:rPr>
               <a:t>DoublePredicate</a:t>
             </a:r>
             <a:r>
-              <a:rPr lang="en-US" dirty="0">
+              <a:rPr lang="en-US" sz="1600" dirty="0">
                 <a:latin typeface="Nunito" pitchFamily="2" charset="0"/>
               </a:rPr>
               <a:t>, and </a:t>
             </a:r>
             <a:r>
-              <a:rPr lang="en-US" dirty="0" err="1">
+              <a:rPr lang="en-US" sz="1600" dirty="0" err="1">
                 <a:latin typeface="Nunito" pitchFamily="2" charset="0"/>
               </a:rPr>
               <a:t>LongPredicate</a:t>
             </a:r>
-            <a:endParaRPr lang="en-US" dirty="0">
+            <a:endParaRPr lang="en-US" sz="1600" dirty="0">
               <a:latin typeface="Nunito" pitchFamily="2" charset="0"/>
             </a:endParaRPr>
           </a:p>
@@ -7482,24 +7594,90 @@
               <a:buChar char="•"/>
             </a:pPr>
             <a:r>
-              <a:rPr lang="en-US" dirty="0">
+              <a:rPr lang="en-US" sz="1600" dirty="0">
                 <a:latin typeface="Nunito" pitchFamily="2" charset="0"/>
               </a:rPr>
-              <a:t>Example : Predicate </a:t>
-            </a:r>
-            <a:r>
-              <a:rPr lang="en-US" dirty="0" err="1">
+              <a:t>Example : Predicate&lt;Integer&gt; </a:t>
+            </a:r>
+            <a:r>
+              <a:rPr lang="en-US" sz="1600" dirty="0" err="1">
                 <a:latin typeface="Nunito" pitchFamily="2" charset="0"/>
               </a:rPr>
-              <a:t>predicate</a:t>
-            </a:r>
-            <a:r>
-              <a:rPr lang="en-US" dirty="0">
+              <a:t>lesserthan</a:t>
+            </a:r>
+            <a:r>
+              <a:rPr lang="en-US" sz="1600" dirty="0">
                 <a:latin typeface="Nunito" pitchFamily="2" charset="0"/>
               </a:rPr>
-              <a:t> = (value) -&gt; value != null;</a:t>
-            </a:r>
-            <a:endParaRPr lang="en-IN" dirty="0">
+              <a:t> = </a:t>
+            </a:r>
+            <a:r>
+              <a:rPr lang="en-US" sz="1600" dirty="0" err="1">
+                <a:latin typeface="Nunito" pitchFamily="2" charset="0"/>
+              </a:rPr>
+              <a:t>i</a:t>
+            </a:r>
+            <a:r>
+              <a:rPr lang="en-US" sz="1600" dirty="0">
+                <a:latin typeface="Nunito" pitchFamily="2" charset="0"/>
+              </a:rPr>
+              <a:t> -&gt; (</a:t>
+            </a:r>
+            <a:r>
+              <a:rPr lang="en-US" sz="1600" dirty="0" err="1">
+                <a:latin typeface="Nunito" pitchFamily="2" charset="0"/>
+              </a:rPr>
+              <a:t>i</a:t>
+            </a:r>
+            <a:r>
+              <a:rPr lang="en-US" sz="1600" dirty="0">
+                <a:latin typeface="Nunito" pitchFamily="2" charset="0"/>
+              </a:rPr>
+              <a:t> &lt; 18); </a:t>
+            </a:r>
+          </a:p>
+          <a:p>
+            <a:pPr lvl="3"/>
+            <a:r>
+              <a:rPr lang="en-US" sz="1600" dirty="0">
+                <a:latin typeface="Nunito" pitchFamily="2" charset="0"/>
+              </a:rPr>
+              <a:t>     </a:t>
+            </a:r>
+            <a:r>
+              <a:rPr lang="en-US" sz="1600" dirty="0" err="1">
+                <a:latin typeface="Nunito" pitchFamily="2" charset="0"/>
+              </a:rPr>
+              <a:t>System.out.println</a:t>
+            </a:r>
+            <a:r>
+              <a:rPr lang="en-US" sz="1600" dirty="0">
+                <a:latin typeface="Nunito" pitchFamily="2" charset="0"/>
+              </a:rPr>
+              <a:t>(</a:t>
+            </a:r>
+            <a:r>
+              <a:rPr lang="en-US" sz="1600" dirty="0" err="1">
+                <a:latin typeface="Nunito" pitchFamily="2" charset="0"/>
+              </a:rPr>
+              <a:t>lesserthan.</a:t>
+            </a:r>
+            <a:r>
+              <a:rPr lang="en-US" sz="1600" b="1" dirty="0" err="1">
+                <a:latin typeface="Nunito" pitchFamily="2" charset="0"/>
+              </a:rPr>
+              <a:t>test</a:t>
+            </a:r>
+            <a:r>
+              <a:rPr lang="en-US" sz="1600" dirty="0">
+                <a:latin typeface="Nunito" pitchFamily="2" charset="0"/>
+              </a:rPr>
+              <a:t>(10)); </a:t>
+            </a:r>
+          </a:p>
+          <a:p>
+            <a:pPr lvl="3"/>
+            <a:endParaRPr lang="en-IN" sz="1600" dirty="0">
               <a:latin typeface="Nunito" pitchFamily="2" charset="0"/>
             </a:endParaRPr>
           </a:p>
@@ -7508,29 +7686,20 @@
               <a:buFont typeface="Arial" panose="020B0604020202020204" pitchFamily="34" charset="0"/>
               <a:buChar char="•"/>
             </a:pPr>
-            <a:endParaRPr lang="en-IN" dirty="0">
-              <a:latin typeface="Nunito" pitchFamily="2" charset="0"/>
-            </a:endParaRPr>
-          </a:p>
-          <a:p>
-            <a:pPr marL="285750" indent="-285750">
-              <a:buFont typeface="Arial" panose="020B0604020202020204" pitchFamily="34" charset="0"/>
-              <a:buChar char="•"/>
-            </a:pPr>
-            <a:r>
-              <a:rPr lang="en-IN" b="1" dirty="0">
+            <a:r>
+              <a:rPr lang="en-IN" sz="1600" b="1" dirty="0">
                 <a:latin typeface="Nunito" pitchFamily="2" charset="0"/>
               </a:rPr>
               <a:t>Function</a:t>
             </a:r>
             <a:r>
-              <a:rPr lang="en-IN" dirty="0">
+              <a:rPr lang="en-IN" sz="1600" dirty="0">
                 <a:latin typeface="Nunito" pitchFamily="2" charset="0"/>
               </a:rPr>
               <a:t> : </a:t>
             </a:r>
             <a:r>
-              <a:rPr lang="en-US" dirty="0">
+              <a:rPr lang="en-US" sz="1600" dirty="0">
                 <a:latin typeface="Nunito" pitchFamily="2" charset="0"/>
               </a:rPr>
               <a:t>receives only a single argument and returns a value after the required processing</a:t>
@@ -7542,55 +7711,55 @@
               <a:buChar char="•"/>
             </a:pPr>
             <a:r>
-              <a:rPr lang="en-US" dirty="0">
+              <a:rPr lang="en-US" sz="1600" dirty="0">
                 <a:latin typeface="Nunito" pitchFamily="2" charset="0"/>
               </a:rPr>
               <a:t>Variants : </a:t>
             </a:r>
             <a:r>
-              <a:rPr lang="en-US" dirty="0" err="1">
+              <a:rPr lang="en-US" sz="1600" dirty="0" err="1">
                 <a:latin typeface="Nunito" pitchFamily="2" charset="0"/>
               </a:rPr>
               <a:t>BiFunction</a:t>
             </a:r>
             <a:r>
-              <a:rPr lang="en-US" dirty="0">
+              <a:rPr lang="en-US" sz="1600" dirty="0">
                 <a:latin typeface="Nunito" pitchFamily="2" charset="0"/>
               </a:rPr>
               <a:t>, </a:t>
             </a:r>
             <a:r>
-              <a:rPr lang="en-US" b="1" dirty="0">
+              <a:rPr lang="en-US" sz="1600" b="1" dirty="0">
                 <a:latin typeface="Nunito" pitchFamily="2" charset="0"/>
               </a:rPr>
               <a:t>Operator</a:t>
             </a:r>
             <a:r>
-              <a:rPr lang="en-US" dirty="0">
+              <a:rPr lang="en-US" sz="1600" dirty="0">
                 <a:latin typeface="Nunito" pitchFamily="2" charset="0"/>
               </a:rPr>
               <a:t> (</a:t>
             </a:r>
             <a:r>
-              <a:rPr lang="en-US" dirty="0" err="1">
+              <a:rPr lang="en-US" sz="1600" dirty="0" err="1">
                 <a:latin typeface="Nunito" pitchFamily="2" charset="0"/>
               </a:rPr>
               <a:t>UnaryOperator</a:t>
             </a:r>
             <a:r>
-              <a:rPr lang="en-US" dirty="0">
+              <a:rPr lang="en-US" sz="1600" dirty="0">
                 <a:latin typeface="Nunito" pitchFamily="2" charset="0"/>
               </a:rPr>
               <a:t> and </a:t>
             </a:r>
             <a:r>
-              <a:rPr lang="en-US" dirty="0" err="1">
+              <a:rPr lang="en-US" sz="1600" dirty="0" err="1">
                 <a:latin typeface="Nunito" pitchFamily="2" charset="0"/>
               </a:rPr>
               <a:t>BinaryOperator</a:t>
             </a:r>
             <a:r>
-              <a:rPr lang="en-US" dirty="0">
+              <a:rPr lang="en-US" sz="1600" dirty="0">
                 <a:latin typeface="Nunito" pitchFamily="2" charset="0"/>
               </a:rPr>
               <a:t>) extends Function and must return the same data type</a:t>
@@ -7602,7 +7771,7 @@
               <a:buChar char="•"/>
             </a:pPr>
             <a:r>
-              <a:rPr lang="en-US" dirty="0">
+              <a:rPr lang="en-US" sz="1600" dirty="0">
                 <a:latin typeface="Nunito" pitchFamily="2" charset="0"/>
               </a:rPr>
               <a:t>Example : Function&lt;Integer, Integer&gt; square = x -&gt; x*x;</a:t>
